--- a/Demo/Decision_Packet_Automation_Intro.pptx
+++ b/Demo/Decision_Packet_Automation_Intro.pptx
@@ -509,7 +509,7 @@
           <a:p>
             <a:r>
               <a:rPr lang="en-US" dirty="0"/>
-              <a:t>Hi, this is Monica Rajagopal, presenting Decision Packet Automation for Life Underwriting and Claims. The scope of this proof of concept is limited to underwriting only.</a:t>
+              <a:t>Hi, this is Monica Rajagopal, from Team MARS, presenting Decision Packet Automation for Life Underwriting and Claims. The scope of this proof of concept is limited to underwriting only.</a:t>
             </a:r>
             <a:endParaRPr lang="en-US" dirty="0"/>
           </a:p>
